--- a/docs/ScalingLaw.pptx
+++ b/docs/ScalingLaw.pptx
@@ -8,7 +8,8 @@
     <p:sldId id="256" r:id="rId2"/>
     <p:sldId id="257" r:id="rId3"/>
     <p:sldId id="258" r:id="rId4"/>
-    <p:sldId id="259" r:id="rId5"/>
+    <p:sldId id="260" r:id="rId5"/>
+    <p:sldId id="259" r:id="rId6"/>
   </p:sldIdLst>
   <p:sldSz cx="12192000" cy="6858000"/>
   <p:notesSz cx="6858000" cy="9144000"/>
@@ -107,6 +108,11 @@
       </a:defRPr>
     </a:lvl9pPr>
   </p:defaultTextStyle>
+  <p:extLst>
+    <p:ext uri="{EFAFB233-063F-42B5-8137-9DF3F51BA10A}">
+      <p15:sldGuideLst xmlns:p15="http://schemas.microsoft.com/office/powerpoint/2012/main"/>
+    </p:ext>
+  </p:extLst>
 </p:presentation>
 </file>
 
@@ -257,7 +263,7 @@
           <a:p>
             <a:fld id="{FAE84F0A-1A69-AB47-8EAB-124C8004A96C}" type="datetimeFigureOut">
               <a:rPr lang="en-US" smtClean="0"/>
-              <a:t>7/22/26</a:t>
+              <a:t>7/27/26</a:t>
             </a:fld>
             <a:endParaRPr lang="en-US"/>
           </a:p>
@@ -455,7 +461,7 @@
           <a:p>
             <a:fld id="{FAE84F0A-1A69-AB47-8EAB-124C8004A96C}" type="datetimeFigureOut">
               <a:rPr lang="en-US" smtClean="0"/>
-              <a:t>7/22/26</a:t>
+              <a:t>7/27/26</a:t>
             </a:fld>
             <a:endParaRPr lang="en-US"/>
           </a:p>
@@ -663,7 +669,7 @@
           <a:p>
             <a:fld id="{FAE84F0A-1A69-AB47-8EAB-124C8004A96C}" type="datetimeFigureOut">
               <a:rPr lang="en-US" smtClean="0"/>
-              <a:t>7/22/26</a:t>
+              <a:t>7/27/26</a:t>
             </a:fld>
             <a:endParaRPr lang="en-US"/>
           </a:p>
@@ -861,7 +867,7 @@
           <a:p>
             <a:fld id="{FAE84F0A-1A69-AB47-8EAB-124C8004A96C}" type="datetimeFigureOut">
               <a:rPr lang="en-US" smtClean="0"/>
-              <a:t>7/22/26</a:t>
+              <a:t>7/27/26</a:t>
             </a:fld>
             <a:endParaRPr lang="en-US"/>
           </a:p>
@@ -1136,7 +1142,7 @@
           <a:p>
             <a:fld id="{FAE84F0A-1A69-AB47-8EAB-124C8004A96C}" type="datetimeFigureOut">
               <a:rPr lang="en-US" smtClean="0"/>
-              <a:t>7/22/26</a:t>
+              <a:t>7/27/26</a:t>
             </a:fld>
             <a:endParaRPr lang="en-US"/>
           </a:p>
@@ -1401,7 +1407,7 @@
           <a:p>
             <a:fld id="{FAE84F0A-1A69-AB47-8EAB-124C8004A96C}" type="datetimeFigureOut">
               <a:rPr lang="en-US" smtClean="0"/>
-              <a:t>7/22/26</a:t>
+              <a:t>7/27/26</a:t>
             </a:fld>
             <a:endParaRPr lang="en-US"/>
           </a:p>
@@ -1813,7 +1819,7 @@
           <a:p>
             <a:fld id="{FAE84F0A-1A69-AB47-8EAB-124C8004A96C}" type="datetimeFigureOut">
               <a:rPr lang="en-US" smtClean="0"/>
-              <a:t>7/22/26</a:t>
+              <a:t>7/27/26</a:t>
             </a:fld>
             <a:endParaRPr lang="en-US"/>
           </a:p>
@@ -1954,7 +1960,7 @@
           <a:p>
             <a:fld id="{FAE84F0A-1A69-AB47-8EAB-124C8004A96C}" type="datetimeFigureOut">
               <a:rPr lang="en-US" smtClean="0"/>
-              <a:t>7/22/26</a:t>
+              <a:t>7/27/26</a:t>
             </a:fld>
             <a:endParaRPr lang="en-US"/>
           </a:p>
@@ -2067,7 +2073,7 @@
           <a:p>
             <a:fld id="{FAE84F0A-1A69-AB47-8EAB-124C8004A96C}" type="datetimeFigureOut">
               <a:rPr lang="en-US" smtClean="0"/>
-              <a:t>7/22/26</a:t>
+              <a:t>7/27/26</a:t>
             </a:fld>
             <a:endParaRPr lang="en-US"/>
           </a:p>
@@ -2378,7 +2384,7 @@
           <a:p>
             <a:fld id="{FAE84F0A-1A69-AB47-8EAB-124C8004A96C}" type="datetimeFigureOut">
               <a:rPr lang="en-US" smtClean="0"/>
-              <a:t>7/22/26</a:t>
+              <a:t>7/27/26</a:t>
             </a:fld>
             <a:endParaRPr lang="en-US"/>
           </a:p>
@@ -2666,7 +2672,7 @@
           <a:p>
             <a:fld id="{FAE84F0A-1A69-AB47-8EAB-124C8004A96C}" type="datetimeFigureOut">
               <a:rPr lang="en-US" smtClean="0"/>
-              <a:t>7/22/26</a:t>
+              <a:t>7/27/26</a:t>
             </a:fld>
             <a:endParaRPr lang="en-US"/>
           </a:p>
@@ -2907,7 +2913,7 @@
           <a:p>
             <a:fld id="{FAE84F0A-1A69-AB47-8EAB-124C8004A96C}" type="datetimeFigureOut">
               <a:rPr lang="en-US" smtClean="0"/>
-              <a:t>7/22/26</a:t>
+              <a:t>7/27/26</a:t>
             </a:fld>
             <a:endParaRPr lang="en-US"/>
           </a:p>
@@ -3793,6 +3799,131 @@
       </p:grpSpPr>
       <p:sp>
         <p:nvSpPr>
+          <p:cNvPr id="5" name="TextBox 4"/>
+          <p:cNvSpPr txBox="1"/>
+          <p:nvPr/>
+        </p:nvSpPr>
+        <p:spPr>
+          <a:xfrm>
+            <a:off x="976183" y="475735"/>
+            <a:ext cx="9873049" cy="461665"/>
+          </a:xfrm>
+          <a:prstGeom prst="rect">
+            <a:avLst/>
+          </a:prstGeom>
+          <a:noFill/>
+        </p:spPr>
+        <p:txBody>
+          <a:bodyPr wrap="square">
+            <a:spAutoFit/>
+          </a:bodyPr>
+          <a:lstStyle/>
+          <a:p>
+            <a:r>
+              <a:rPr lang="en-US" sz="2400" b="1" dirty="0"/>
+              <a:t>Example: RR decay curves, km vs. rank (</a:t>
+            </a:r>
+            <a:r>
+              <a:rPr lang="en-US" sz="2400" b="1" dirty="0">
+                <a:solidFill>
+                  <a:srgbClr val="FF0000"/>
+                </a:solidFill>
+              </a:rPr>
+              <a:t>mock data</a:t>
+            </a:r>
+            <a:r>
+              <a:rPr lang="en-US" sz="2400" b="1" dirty="0"/>
+              <a:t>)</a:t>
+            </a:r>
+          </a:p>
+        </p:txBody>
+      </p:sp>
+      <p:pic>
+        <p:nvPicPr>
+          <p:cNvPr id="7" name="Decay curve mockup"/>
+          <p:cNvPicPr>
+            <a:picLocks noChangeAspect="1"/>
+          </p:cNvPicPr>
+          <p:nvPr/>
+        </p:nvPicPr>
+        <p:blipFill>
+          <a:blip r:embed="rId2"/>
+          <a:stretch>
+            <a:fillRect/>
+          </a:stretch>
+        </p:blipFill>
+        <p:spPr>
+          <a:xfrm>
+            <a:off x="1295400" y="1300000"/>
+            <a:ext cx="9601200" cy="4318139"/>
+          </a:xfrm>
+          <a:prstGeom prst="rect">
+            <a:avLst/>
+          </a:prstGeom>
+        </p:spPr>
+      </p:pic>
+      <p:sp>
+        <p:nvSpPr>
+          <p:cNvPr id="8" name="Caption"/>
+          <p:cNvSpPr txBox="1"/>
+          <p:nvPr/>
+        </p:nvSpPr>
+        <p:spPr>
+          <a:xfrm>
+            <a:off x="1295400" y="5720000"/>
+            <a:ext cx="9601200" cy="400000"/>
+          </a:xfrm>
+          <a:prstGeom prst="rect">
+            <a:avLst/>
+          </a:prstGeom>
+          <a:noFill/>
+        </p:spPr>
+        <p:txBody>
+          <a:bodyPr wrap="square">
+            <a:normAutofit/>
+          </a:bodyPr>
+          <a:lstStyle/>
+          <a:p>
+            <a:pPr algn="ctr"/>
+            <a:r>
+              <a:rPr lang="en-US" dirty="0"/>
+              <a:t>Same decay function in rank-space, scaled by density-dependent km spacing.</a:t>
+            </a:r>
+          </a:p>
+        </p:txBody>
+      </p:sp>
+    </p:spTree>
+    <p:extLst>
+      <p:ext uri="{BB962C8B-B14F-4D97-AF65-F5344CB8AC3E}">
+        <p14:creationId xmlns:p14="http://schemas.microsoft.com/office/powerpoint/2010/main" val="3866036254"/>
+      </p:ext>
+    </p:extLst>
+  </p:cSld>
+  <p:clrMapOvr>
+    <a:masterClrMapping/>
+  </p:clrMapOvr>
+</p:sld>
+</file>
+
+<file path=ppt/slides/slide5.xml><?xml version="1.0" encoding="utf-8"?>
+<p:sld xmlns:a="http://schemas.openxmlformats.org/drawingml/2006/main" xmlns:r="http://schemas.openxmlformats.org/officeDocument/2006/relationships" xmlns:p="http://schemas.openxmlformats.org/presentationml/2006/main">
+  <p:cSld>
+    <p:spTree>
+      <p:nvGrpSpPr>
+        <p:cNvPr id="1" name=""/>
+        <p:cNvGrpSpPr/>
+        <p:nvPr/>
+      </p:nvGrpSpPr>
+      <p:grpSpPr>
+        <a:xfrm>
+          <a:off x="0" y="0"/>
+          <a:ext cx="0" cy="0"/>
+          <a:chOff x="0" y="0"/>
+          <a:chExt cx="0" cy="0"/>
+        </a:xfrm>
+      </p:grpSpPr>
+      <p:sp>
+        <p:nvSpPr>
           <p:cNvPr id="5" name="TextBox 4">
             <a:extLst>
               <a:ext uri="{FF2B5EF4-FFF2-40B4-BE49-F238E27FC236}">
@@ -3868,6 +3999,197 @@
           </a:p>
           <a:p>
             <a:endParaRPr lang="en-US" sz="2400" dirty="0"/>
+          </a:p>
+        </p:txBody>
+      </p:sp>
+      <p:pic>
+        <p:nvPicPr>
+          <p:cNvPr id="2" name="Decay curve mockup">
+            <a:extLst>
+              <a:ext uri="{FF2B5EF4-FFF2-40B4-BE49-F238E27FC236}">
+                <a16:creationId xmlns:a16="http://schemas.microsoft.com/office/drawing/2014/main" id="{CF519B44-5DB9-BCF3-FC4A-82EC9FFDA934}"/>
+              </a:ext>
+            </a:extLst>
+          </p:cNvPr>
+          <p:cNvPicPr>
+            <a:picLocks noChangeAspect="1"/>
+          </p:cNvPicPr>
+          <p:nvPr/>
+        </p:nvPicPr>
+        <p:blipFill>
+          <a:blip r:embed="rId2"/>
+          <a:srcRect l="-151" t="20426" r="49118" b="-9075"/>
+          <a:stretch>
+            <a:fillRect/>
+          </a:stretch>
+        </p:blipFill>
+        <p:spPr>
+          <a:xfrm>
+            <a:off x="6569243" y="3429000"/>
+            <a:ext cx="3953614" cy="3088797"/>
+          </a:xfrm>
+          <a:prstGeom prst="rect">
+            <a:avLst/>
+          </a:prstGeom>
+        </p:spPr>
+      </p:pic>
+      <p:cxnSp>
+        <p:nvCxnSpPr>
+          <p:cNvPr id="4" name="Straight Connector 3">
+            <a:extLst>
+              <a:ext uri="{FF2B5EF4-FFF2-40B4-BE49-F238E27FC236}">
+                <a16:creationId xmlns:a16="http://schemas.microsoft.com/office/drawing/2014/main" id="{FC377FAD-D92E-58F5-85A8-40343354D2A3}"/>
+              </a:ext>
+            </a:extLst>
+          </p:cNvPr>
+          <p:cNvCxnSpPr/>
+          <p:nvPr/>
+        </p:nvCxnSpPr>
+        <p:spPr>
+          <a:xfrm flipV="1">
+            <a:off x="9262334" y="3633934"/>
+            <a:ext cx="0" cy="2175195"/>
+          </a:xfrm>
+          <a:prstGeom prst="line">
+            <a:avLst/>
+          </a:prstGeom>
+        </p:spPr>
+        <p:style>
+          <a:lnRef idx="2">
+            <a:schemeClr val="accent1"/>
+          </a:lnRef>
+          <a:fillRef idx="0">
+            <a:schemeClr val="accent1"/>
+          </a:fillRef>
+          <a:effectRef idx="1">
+            <a:schemeClr val="accent1"/>
+          </a:effectRef>
+          <a:fontRef idx="minor">
+            <a:schemeClr val="tx1"/>
+          </a:fontRef>
+        </p:style>
+      </p:cxnSp>
+      <p:sp>
+        <p:nvSpPr>
+          <p:cNvPr id="7" name="TextBox 6">
+            <a:extLst>
+              <a:ext uri="{FF2B5EF4-FFF2-40B4-BE49-F238E27FC236}">
+                <a16:creationId xmlns:a16="http://schemas.microsoft.com/office/drawing/2014/main" id="{4768E2BA-E303-1442-DEF3-98CA5E0CAEBC}"/>
+              </a:ext>
+            </a:extLst>
+          </p:cNvPr>
+          <p:cNvSpPr txBox="1"/>
+          <p:nvPr/>
+        </p:nvSpPr>
+        <p:spPr>
+          <a:xfrm>
+            <a:off x="8546050" y="3290500"/>
+            <a:ext cx="1693429" cy="276999"/>
+          </a:xfrm>
+          <a:prstGeom prst="rect">
+            <a:avLst/>
+          </a:prstGeom>
+          <a:noFill/>
+        </p:spPr>
+        <p:txBody>
+          <a:bodyPr wrap="square">
+            <a:spAutoFit/>
+          </a:bodyPr>
+          <a:lstStyle/>
+          <a:p>
+            <a:r>
+              <a:rPr lang="en-US" sz="1200" dirty="0" err="1"/>
+              <a:t>SaTScan</a:t>
+            </a:r>
+            <a:r>
+              <a:rPr lang="en-US" sz="1200" dirty="0"/>
+              <a:t> threshold</a:t>
+            </a:r>
+          </a:p>
+        </p:txBody>
+      </p:sp>
+      <p:cxnSp>
+        <p:nvCxnSpPr>
+          <p:cNvPr id="9" name="Straight Arrow Connector 8">
+            <a:extLst>
+              <a:ext uri="{FF2B5EF4-FFF2-40B4-BE49-F238E27FC236}">
+                <a16:creationId xmlns:a16="http://schemas.microsoft.com/office/drawing/2014/main" id="{13B86D31-A0FB-DD60-BF7F-421C08B3EEAD}"/>
+              </a:ext>
+            </a:extLst>
+          </p:cNvPr>
+          <p:cNvCxnSpPr>
+            <a:cxnSpLocks/>
+          </p:cNvCxnSpPr>
+          <p:nvPr/>
+        </p:nvCxnSpPr>
+        <p:spPr>
+          <a:xfrm flipH="1">
+            <a:off x="9666685" y="5142156"/>
+            <a:ext cx="150607" cy="344245"/>
+          </a:xfrm>
+          <a:prstGeom prst="straightConnector1">
+            <a:avLst/>
+          </a:prstGeom>
+          <a:ln>
+            <a:tailEnd type="triangle"/>
+          </a:ln>
+        </p:spPr>
+        <p:style>
+          <a:lnRef idx="2">
+            <a:schemeClr val="accent1"/>
+          </a:lnRef>
+          <a:fillRef idx="0">
+            <a:schemeClr val="accent1"/>
+          </a:fillRef>
+          <a:effectRef idx="1">
+            <a:schemeClr val="accent1"/>
+          </a:effectRef>
+          <a:fontRef idx="minor">
+            <a:schemeClr val="tx1"/>
+          </a:fontRef>
+        </p:style>
+      </p:cxnSp>
+      <p:sp>
+        <p:nvSpPr>
+          <p:cNvPr id="11" name="TextBox 10">
+            <a:extLst>
+              <a:ext uri="{FF2B5EF4-FFF2-40B4-BE49-F238E27FC236}">
+                <a16:creationId xmlns:a16="http://schemas.microsoft.com/office/drawing/2014/main" id="{FA0F04C4-C863-BCA6-9DD1-9E33D962BF82}"/>
+              </a:ext>
+            </a:extLst>
+          </p:cNvPr>
+          <p:cNvSpPr txBox="1"/>
+          <p:nvPr/>
+        </p:nvSpPr>
+        <p:spPr>
+          <a:xfrm>
+            <a:off x="9459686" y="4680491"/>
+            <a:ext cx="1693432" cy="461665"/>
+          </a:xfrm>
+          <a:prstGeom prst="rect">
+            <a:avLst/>
+          </a:prstGeom>
+          <a:noFill/>
+        </p:spPr>
+        <p:txBody>
+          <a:bodyPr wrap="square">
+            <a:spAutoFit/>
+          </a:bodyPr>
+          <a:lstStyle/>
+          <a:p>
+            <a:pPr algn="ctr"/>
+            <a:r>
+              <a:rPr lang="en-US" sz="1200" dirty="0"/>
+              <a:t>Censored in </a:t>
+            </a:r>
+            <a:r>
+              <a:rPr lang="en-US" sz="1200" dirty="0" err="1"/>
+              <a:t>SaTScan</a:t>
+            </a:r>
+            <a:r>
+              <a:rPr lang="en-US" sz="1200" dirty="0"/>
+              <a:t> by threshold </a:t>
+            </a:r>
           </a:p>
         </p:txBody>
       </p:sp>
